--- a/test-corpus/word-verification/order-flow.pptx
+++ b/test-corpus/word-verification/order-flow.pptx
@@ -144,7 +144,7 @@
         </p:nvSpPr>
         <p:spPr>
           <a:xfrm>
-            <a:off x="3802997" y="1028700"/>
+            <a:off x="1681589" y="1028700"/>
             <a:ext cx="508649" cy="357007"/>
           </a:xfrm>
           <a:prstGeom prst="rect">
@@ -212,7 +212,7 @@
         </p:nvSpPr>
         <p:spPr>
           <a:xfrm>
-            <a:off x="3409950" y="1657712"/>
+            <a:off x="1288542" y="1657712"/>
             <a:ext cx="1294744" cy="714013"/>
           </a:xfrm>
           <a:prstGeom prst="diamond">
@@ -280,7 +280,7 @@
         </p:nvSpPr>
         <p:spPr>
           <a:xfrm>
-            <a:off x="4320487" y="2643730"/>
+            <a:off x="2199079" y="2643730"/>
             <a:ext cx="508649" cy="357007"/>
           </a:xfrm>
           <a:prstGeom prst="rect">
@@ -348,7 +348,7 @@
         </p:nvSpPr>
         <p:spPr>
           <a:xfrm>
-            <a:off x="3505152" y="5516784"/>
+            <a:off x="1383744" y="5516784"/>
             <a:ext cx="508649" cy="357007"/>
           </a:xfrm>
           <a:prstGeom prst="rect">
@@ -416,7 +416,7 @@
         </p:nvSpPr>
         <p:spPr>
           <a:xfrm>
-            <a:off x="4320487" y="3272742"/>
+            <a:off x="2199079" y="3272742"/>
             <a:ext cx="508649" cy="357007"/>
           </a:xfrm>
           <a:prstGeom prst="rect">
@@ -484,7 +484,7 @@
         </p:nvSpPr>
         <p:spPr>
           <a:xfrm>
-            <a:off x="4115123" y="3901753"/>
+            <a:off x="1993715" y="3901753"/>
             <a:ext cx="919377" cy="714013"/>
           </a:xfrm>
           <a:prstGeom prst="diamond">
@@ -552,7 +552,7 @@
         </p:nvSpPr>
         <p:spPr>
           <a:xfrm>
-            <a:off x="4813496" y="4938773"/>
+            <a:off x="2692088" y="4938773"/>
             <a:ext cx="508649" cy="255005"/>
           </a:xfrm>
           <a:prstGeom prst="rect">
@@ -620,7 +620,7 @@
         </p:nvSpPr>
         <p:spPr>
           <a:xfrm>
-            <a:off x="4100843" y="4887772"/>
+            <a:off x="1979435" y="4887772"/>
             <a:ext cx="508649" cy="357007"/>
           </a:xfrm>
           <a:prstGeom prst="rect">
@@ -688,7 +688,7 @@
         </p:nvSpPr>
         <p:spPr>
           <a:xfrm>
-            <a:off x="4813496" y="5516784"/>
+            <a:off x="2692088" y="5516784"/>
             <a:ext cx="508649" cy="357007"/>
           </a:xfrm>
           <a:prstGeom prst="rect">
@@ -756,7 +756,7 @@
         </p:nvSpPr>
         <p:spPr>
           <a:xfrm>
-            <a:off x="4281726" y="6145795"/>
+            <a:off x="2160318" y="6145795"/>
             <a:ext cx="263845" cy="255005"/>
           </a:xfrm>
           <a:prstGeom prst="rect">
@@ -827,7 +827,7 @@
         </p:nvCxnSpPr>
         <p:spPr>
           <a:xfrm>
-            <a:off x="4057322" y="1385707"/>
+            <a:off x="1935914" y="1385707"/>
             <a:ext cx="0" cy="272005"/>
           </a:xfrm>
           <a:prstGeom prst="line">
@@ -867,7 +867,7 @@
         </p:nvCxnSpPr>
         <p:spPr>
           <a:xfrm>
-            <a:off x="4057322" y="2371725"/>
+            <a:off x="1935914" y="2371725"/>
             <a:ext cx="517490" cy="272005"/>
           </a:xfrm>
           <a:prstGeom prst="line">
@@ -904,7 +904,7 @@
         </p:nvSpPr>
         <p:spPr>
           <a:xfrm>
-            <a:off x="4230113" y="2466927"/>
+            <a:off x="2108705" y="2466927"/>
             <a:ext cx="171907" cy="81602"/>
           </a:xfrm>
           <a:prstGeom prst="rect">
@@ -953,7 +953,7 @@
         </p:nvCxnSpPr>
         <p:spPr>
           <a:xfrm flipH="1">
-            <a:off x="3759477" y="2371725"/>
+            <a:off x="1638069" y="2371725"/>
             <a:ext cx="297845" cy="3145059"/>
           </a:xfrm>
           <a:prstGeom prst="line">
@@ -990,7 +990,7 @@
         </p:nvSpPr>
         <p:spPr>
           <a:xfrm>
-            <a:off x="3822446" y="3903453"/>
+            <a:off x="1701038" y="3903453"/>
             <a:ext cx="171907" cy="81602"/>
           </a:xfrm>
           <a:prstGeom prst="rect">
@@ -1039,7 +1039,7 @@
         </p:nvCxnSpPr>
         <p:spPr>
           <a:xfrm>
-            <a:off x="4574812" y="3000737"/>
+            <a:off x="2453404" y="3000737"/>
             <a:ext cx="0" cy="272005"/>
           </a:xfrm>
           <a:prstGeom prst="line">
@@ -1079,7 +1079,7 @@
         </p:nvCxnSpPr>
         <p:spPr>
           <a:xfrm>
-            <a:off x="4574812" y="3629748"/>
+            <a:off x="2453404" y="3629748"/>
             <a:ext cx="0" cy="272005"/>
           </a:xfrm>
           <a:prstGeom prst="line">
@@ -1119,7 +1119,7 @@
         </p:nvCxnSpPr>
         <p:spPr>
           <a:xfrm>
-            <a:off x="4574812" y="4615767"/>
+            <a:off x="2453404" y="4615767"/>
             <a:ext cx="493009" cy="323006"/>
           </a:xfrm>
           <a:prstGeom prst="line">
@@ -1156,7 +1156,7 @@
         </p:nvSpPr>
         <p:spPr>
           <a:xfrm>
-            <a:off x="4735363" y="4736469"/>
+            <a:off x="2613955" y="4736469"/>
             <a:ext cx="171907" cy="81602"/>
           </a:xfrm>
           <a:prstGeom prst="rect">
@@ -1205,7 +1205,7 @@
         </p:nvCxnSpPr>
         <p:spPr>
           <a:xfrm flipH="1">
-            <a:off x="4355168" y="4615767"/>
+            <a:off x="2233760" y="4615767"/>
             <a:ext cx="219644" cy="272005"/>
           </a:xfrm>
           <a:prstGeom prst="line">
@@ -1242,7 +1242,7 @@
         </p:nvSpPr>
         <p:spPr>
           <a:xfrm>
-            <a:off x="4379036" y="4710968"/>
+            <a:off x="2257628" y="4710968"/>
             <a:ext cx="171907" cy="81602"/>
           </a:xfrm>
           <a:prstGeom prst="rect">
@@ -1291,7 +1291,7 @@
         </p:nvCxnSpPr>
         <p:spPr>
           <a:xfrm flipV="1">
-            <a:off x="4355168" y="4615767"/>
+            <a:off x="2233760" y="4615767"/>
             <a:ext cx="219644" cy="272005"/>
           </a:xfrm>
           <a:prstGeom prst="line">
@@ -1331,7 +1331,7 @@
         </p:nvCxnSpPr>
         <p:spPr>
           <a:xfrm>
-            <a:off x="5067821" y="5193778"/>
+            <a:off x="2946413" y="5193778"/>
             <a:ext cx="0" cy="323006"/>
           </a:xfrm>
           <a:prstGeom prst="line">
@@ -1371,7 +1371,7 @@
         </p:nvCxnSpPr>
         <p:spPr>
           <a:xfrm>
-            <a:off x="4013801" y="5695287"/>
+            <a:off x="1892393" y="5695287"/>
             <a:ext cx="267925" cy="578011"/>
           </a:xfrm>
           <a:prstGeom prst="line">
@@ -1411,7 +1411,7 @@
         </p:nvCxnSpPr>
         <p:spPr>
           <a:xfrm flipH="1">
-            <a:off x="4545571" y="5695287"/>
+            <a:off x="2424163" y="5695287"/>
             <a:ext cx="267925" cy="578011"/>
           </a:xfrm>
           <a:prstGeom prst="line">
@@ -1440,6 +1440,192 @@
           </a:fontRef>
         </p:style>
       </p:cxnSp>
+      <p:sp>
+        <p:nvSpPr>
+          <p:cNvPr id="4" name="Mermaid source"/>
+          <p:cNvSpPr/>
+          <p:nvPr/>
+        </p:nvSpPr>
+        <p:spPr>
+          <a:xfrm>
+            <a:off x="7674864" y="1028700"/>
+            <a:ext cx="4059936" cy="5372100"/>
+          </a:xfrm>
+          <a:prstGeom prst="rect">
+            <a:avLst/>
+          </a:prstGeom>
+          <a:solidFill>
+            <a:srgbClr val="F3F4F6"/>
+          </a:solidFill>
+          <a:ln w="9525">
+            <a:solidFill>
+              <a:srgbClr val="D1D5DB"/>
+            </a:solidFill>
+          </a:ln>
+        </p:spPr>
+        <p:txBody>
+          <a:bodyPr wrap="square" lIns="91440" tIns="45720" rIns="91440" bIns="45720" anchor="t">
+            <a:noAutofit/>
+          </a:bodyPr>
+          <a:lstStyle/>
+          <a:p>
+            <a:pPr algn="l"/>
+            <a:r>
+              <a:rPr lang="en-US" sz="1400" dirty="0">
+                <a:solidFill>
+                  <a:srgbClr val="1F2937"/>
+                </a:solidFill>
+                <a:latin typeface="Consolas"/>
+                <a:cs typeface="Consolas"/>
+              </a:rPr>
+              <a:t>flowchart TD</a:t>
+            </a:r>
+          </a:p>
+          <a:p>
+            <a:pPr algn="l"/>
+            <a:r>
+              <a:rPr lang="en-US" sz="1400" dirty="0">
+                <a:solidFill>
+                  <a:srgbClr val="1F2937"/>
+                </a:solidFill>
+                <a:latin typeface="Consolas"/>
+                <a:cs typeface="Consolas"/>
+              </a:rPr>
+              <a:t>    A[Commande recue] --&gt; B{Stock disponible?}</a:t>
+            </a:r>
+          </a:p>
+          <a:p>
+            <a:pPr algn="l"/>
+            <a:r>
+              <a:rPr lang="en-US" sz="1400" dirty="0">
+                <a:solidFill>
+                  <a:srgbClr val="1F2937"/>
+                </a:solidFill>
+                <a:latin typeface="Consolas"/>
+                <a:cs typeface="Consolas"/>
+              </a:rPr>
+              <a:t>    B --&gt;|oui| C[Reserver stock]</a:t>
+            </a:r>
+          </a:p>
+          <a:p>
+            <a:pPr algn="l"/>
+            <a:r>
+              <a:rPr lang="en-US" sz="1400" dirty="0">
+                <a:solidFill>
+                  <a:srgbClr val="1F2937"/>
+                </a:solidFill>
+                <a:latin typeface="Consolas"/>
+                <a:cs typeface="Consolas"/>
+              </a:rPr>
+              <a:t>    B --&gt;|non| D[Notifier rupture]</a:t>
+            </a:r>
+          </a:p>
+          <a:p>
+            <a:pPr algn="l"/>
+            <a:r>
+              <a:rPr lang="en-US" sz="1400" dirty="0">
+                <a:solidFill>
+                  <a:srgbClr val="1F2937"/>
+                </a:solidFill>
+                <a:latin typeface="Consolas"/>
+                <a:cs typeface="Consolas"/>
+              </a:rPr>
+              <a:t>    C --&gt; E[Preparer colis]</a:t>
+            </a:r>
+          </a:p>
+          <a:p>
+            <a:pPr algn="l"/>
+            <a:r>
+              <a:rPr lang="en-US" sz="1400" dirty="0">
+                <a:solidFill>
+                  <a:srgbClr val="1F2937"/>
+                </a:solidFill>
+                <a:latin typeface="Consolas"/>
+                <a:cs typeface="Consolas"/>
+              </a:rPr>
+              <a:t>    E --&gt; F{Adresse valide?}</a:t>
+            </a:r>
+          </a:p>
+          <a:p>
+            <a:pPr algn="l"/>
+            <a:r>
+              <a:rPr lang="en-US" sz="1400" dirty="0">
+                <a:solidFill>
+                  <a:srgbClr val="1F2937"/>
+                </a:solidFill>
+                <a:latin typeface="Consolas"/>
+                <a:cs typeface="Consolas"/>
+              </a:rPr>
+              <a:t>    F --&gt;|oui| G[Expedier]</a:t>
+            </a:r>
+          </a:p>
+          <a:p>
+            <a:pPr algn="l"/>
+            <a:r>
+              <a:rPr lang="en-US" sz="1400" dirty="0">
+                <a:solidFill>
+                  <a:srgbClr val="1F2937"/>
+                </a:solidFill>
+                <a:latin typeface="Consolas"/>
+                <a:cs typeface="Consolas"/>
+              </a:rPr>
+              <a:t>    F --&gt;|non| H[Corriger adresse]</a:t>
+            </a:r>
+          </a:p>
+          <a:p>
+            <a:pPr algn="l"/>
+            <a:r>
+              <a:rPr lang="en-US" sz="1400" dirty="0">
+                <a:solidFill>
+                  <a:srgbClr val="1F2937"/>
+                </a:solidFill>
+                <a:latin typeface="Consolas"/>
+                <a:cs typeface="Consolas"/>
+              </a:rPr>
+              <a:t>    H --&gt; F</a:t>
+            </a:r>
+          </a:p>
+          <a:p>
+            <a:pPr algn="l"/>
+            <a:r>
+              <a:rPr lang="en-US" sz="1400" dirty="0">
+                <a:solidFill>
+                  <a:srgbClr val="1F2937"/>
+                </a:solidFill>
+                <a:latin typeface="Consolas"/>
+                <a:cs typeface="Consolas"/>
+              </a:rPr>
+              <a:t>    G --&gt; I[Notifier client]</a:t>
+            </a:r>
+          </a:p>
+          <a:p>
+            <a:pPr algn="l"/>
+            <a:r>
+              <a:rPr lang="en-US" sz="1400" dirty="0">
+                <a:solidFill>
+                  <a:srgbClr val="1F2937"/>
+                </a:solidFill>
+                <a:latin typeface="Consolas"/>
+                <a:cs typeface="Consolas"/>
+              </a:rPr>
+              <a:t>    D --&gt; J[Fin]</a:t>
+            </a:r>
+          </a:p>
+          <a:p>
+            <a:pPr algn="l"/>
+            <a:r>
+              <a:rPr lang="en-US" sz="1400" dirty="0">
+                <a:solidFill>
+                  <a:srgbClr val="1F2937"/>
+                </a:solidFill>
+                <a:latin typeface="Consolas"/>
+                <a:cs typeface="Consolas"/>
+              </a:rPr>
+              <a:t>    I --&gt; J</a:t>
+            </a:r>
+          </a:p>
+        </p:txBody>
+      </p:sp>
     </p:spTree>
   </p:cSld>
   <p:clrMapOvr>
